--- a/docs/pptx/week-4-advanced.pptx
+++ b/docs/pptx/week-4-advanced.pptx
@@ -7795,7 +7795,7 @@
         <p:spPr>
           <a:xfrm>
             <a:off x="548640" y="960120"/>
-            <a:ext cx="10972800" cy="1188720"/>
+            <a:ext cx="10972800" cy="1356360"/>
           </a:xfrm>
           <a:prstGeom prst="rect">
             <a:avLst/>
@@ -7836,8 +7836,8 @@
         </p:nvSpPr>
         <p:spPr>
           <a:xfrm>
-            <a:off x="548640" y="2194560"/>
-            <a:ext cx="10972800" cy="457200"/>
+            <a:off x="548640" y="2362199"/>
+            <a:ext cx="10972800" cy="365760"/>
           </a:xfrm>
           <a:prstGeom prst="rect">
             <a:avLst/>
@@ -7874,7 +7874,7 @@
         </p:nvSpPr>
         <p:spPr>
           <a:xfrm>
-            <a:off x="548640" y="2834640"/>
+            <a:off x="548640" y="2910839"/>
             <a:ext cx="11155680" cy="1920240"/>
           </a:xfrm>
           <a:prstGeom prst="rect">
@@ -7920,7 +7920,7 @@
         </p:nvSpPr>
         <p:spPr>
           <a:xfrm>
-            <a:off x="777240" y="2926080"/>
+            <a:off x="777240" y="3002279"/>
             <a:ext cx="10607040" cy="320040"/>
           </a:xfrm>
           <a:prstGeom prst="rect">
@@ -7958,7 +7958,7 @@
         </p:nvSpPr>
         <p:spPr>
           <a:xfrm>
-            <a:off x="777240" y="3246120"/>
+            <a:off x="777240" y="3322319"/>
             <a:ext cx="10607040" cy="1417320"/>
           </a:xfrm>
           <a:prstGeom prst="rect">
@@ -9842,7 +9842,11 @@
           </a:bodyPr>
           <a:lstStyle/>
           <a:p>
-            <a:pPr algn="l"/>
+            <a:pPr algn="l">
+              <a:lnSpc>
+                <a:spcPct val="105000"/>
+              </a:lnSpc>
+            </a:pPr>
             <a:r>
               <a:rPr sz="3200" b="1" i="0">
                 <a:solidFill>
@@ -9863,7 +9867,7 @@
         </p:nvSpPr>
         <p:spPr>
           <a:xfrm>
-            <a:off x="548640" y="1188720"/>
+            <a:off x="548640" y="1207008"/>
             <a:ext cx="11155680" cy="365760"/>
           </a:xfrm>
           <a:prstGeom prst="rect">
@@ -9901,7 +9905,7 @@
         </p:nvSpPr>
         <p:spPr>
           <a:xfrm>
-            <a:off x="548640" y="1691640"/>
+            <a:off x="548640" y="1709928"/>
             <a:ext cx="11155680" cy="1828800"/>
           </a:xfrm>
           <a:prstGeom prst="rect">
@@ -9945,7 +9949,7 @@
         </p:nvSpPr>
         <p:spPr>
           <a:xfrm>
-            <a:off x="548640" y="1691640"/>
+            <a:off x="548640" y="1709928"/>
             <a:ext cx="109728" cy="1828800"/>
           </a:xfrm>
           <a:prstGeom prst="rect">
@@ -9989,7 +9993,7 @@
         </p:nvSpPr>
         <p:spPr>
           <a:xfrm>
-            <a:off x="914400" y="1920240"/>
+            <a:off x="914400" y="1938528"/>
             <a:ext cx="10607040" cy="1371600"/>
           </a:xfrm>
           <a:prstGeom prst="rect">
@@ -10344,7 +10348,7 @@
         <p:spPr>
           <a:xfrm>
             <a:off x="548640" y="411480"/>
-            <a:ext cx="11155680" cy="868680"/>
+            <a:ext cx="11155680" cy="777240"/>
           </a:xfrm>
           <a:prstGeom prst="rect">
             <a:avLst/>
@@ -10385,7 +10389,7 @@
         </p:nvSpPr>
         <p:spPr>
           <a:xfrm>
-            <a:off x="548640" y="1280160"/>
+            <a:off x="548640" y="1234440"/>
             <a:ext cx="11155680" cy="365760"/>
           </a:xfrm>
           <a:prstGeom prst="rect">
@@ -10423,7 +10427,7 @@
         </p:nvSpPr>
         <p:spPr>
           <a:xfrm>
-            <a:off x="548640" y="1828800"/>
+            <a:off x="548640" y="1737360"/>
             <a:ext cx="5486400" cy="411480"/>
           </a:xfrm>
           <a:prstGeom prst="rect">
@@ -10461,7 +10465,7 @@
         </p:nvSpPr>
         <p:spPr>
           <a:xfrm>
-            <a:off x="548640" y="2286000"/>
+            <a:off x="548640" y="2194560"/>
             <a:ext cx="5486400" cy="3749040"/>
           </a:xfrm>
           <a:prstGeom prst="rect">
@@ -10647,7 +10651,7 @@
         </p:nvSpPr>
         <p:spPr>
           <a:xfrm>
-            <a:off x="6309360" y="1828800"/>
+            <a:off x="6309360" y="1737360"/>
             <a:ext cx="5486400" cy="411480"/>
           </a:xfrm>
           <a:prstGeom prst="rect">
@@ -10685,7 +10689,7 @@
         </p:nvSpPr>
         <p:spPr>
           <a:xfrm>
-            <a:off x="6309360" y="2286000"/>
+            <a:off x="6309360" y="2194560"/>
             <a:ext cx="5486400" cy="3749040"/>
           </a:xfrm>
           <a:prstGeom prst="rect">
@@ -12845,7 +12849,11 @@
           </a:bodyPr>
           <a:lstStyle/>
           <a:p>
-            <a:pPr algn="l"/>
+            <a:pPr algn="l">
+              <a:lnSpc>
+                <a:spcPct val="105000"/>
+              </a:lnSpc>
+            </a:pPr>
             <a:r>
               <a:rPr sz="3200" b="1" i="0">
                 <a:solidFill>
@@ -12866,7 +12874,7 @@
         </p:nvSpPr>
         <p:spPr>
           <a:xfrm>
-            <a:off x="548640" y="1188720"/>
+            <a:off x="548640" y="1207008"/>
             <a:ext cx="11155680" cy="365760"/>
           </a:xfrm>
           <a:prstGeom prst="rect">
@@ -12904,8 +12912,8 @@
         </p:nvSpPr>
         <p:spPr>
           <a:xfrm>
-            <a:off x="548640" y="1691640"/>
-            <a:ext cx="11155680" cy="2377440"/>
+            <a:off x="548640" y="1709928"/>
+            <a:ext cx="11155680" cy="2450592"/>
           </a:xfrm>
           <a:prstGeom prst="rect">
             <a:avLst/>
@@ -13799,7 +13807,7 @@
         <p:spPr>
           <a:xfrm>
             <a:off x="548640" y="411480"/>
-            <a:ext cx="11155680" cy="868680"/>
+            <a:ext cx="11155680" cy="1089660"/>
           </a:xfrm>
           <a:prstGeom prst="rect">
             <a:avLst/>
@@ -13840,7 +13848,7 @@
         </p:nvSpPr>
         <p:spPr>
           <a:xfrm>
-            <a:off x="548640" y="1280160"/>
+            <a:off x="548640" y="1546860"/>
             <a:ext cx="11155680" cy="365760"/>
           </a:xfrm>
           <a:prstGeom prst="rect">
@@ -13878,7 +13886,7 @@
         </p:nvSpPr>
         <p:spPr>
           <a:xfrm>
-            <a:off x="548640" y="1828800"/>
+            <a:off x="548640" y="2049780"/>
             <a:ext cx="5486400" cy="411480"/>
           </a:xfrm>
           <a:prstGeom prst="rect">
@@ -13916,8 +13924,8 @@
         </p:nvSpPr>
         <p:spPr>
           <a:xfrm>
-            <a:off x="548640" y="2286000"/>
-            <a:ext cx="5486400" cy="3749040"/>
+            <a:off x="548640" y="2506980"/>
+            <a:ext cx="5486400" cy="3436620"/>
           </a:xfrm>
           <a:prstGeom prst="rect">
             <a:avLst/>
@@ -14042,7 +14050,7 @@
         </p:nvSpPr>
         <p:spPr>
           <a:xfrm>
-            <a:off x="6309360" y="1828800"/>
+            <a:off x="6309360" y="2049780"/>
             <a:ext cx="5486400" cy="411480"/>
           </a:xfrm>
           <a:prstGeom prst="rect">
@@ -14080,8 +14088,8 @@
         </p:nvSpPr>
         <p:spPr>
           <a:xfrm>
-            <a:off x="6309360" y="2286000"/>
-            <a:ext cx="5486400" cy="3749040"/>
+            <a:off x="6309360" y="2506980"/>
+            <a:ext cx="5486400" cy="3436620"/>
           </a:xfrm>
           <a:prstGeom prst="rect">
             <a:avLst/>
@@ -17220,7 +17228,7 @@
         <p:spPr>
           <a:xfrm>
             <a:off x="548640" y="411480"/>
-            <a:ext cx="11155680" cy="640080"/>
+            <a:ext cx="11155680" cy="964692"/>
           </a:xfrm>
           <a:prstGeom prst="rect">
             <a:avLst/>
@@ -17236,7 +17244,11 @@
           </a:bodyPr>
           <a:lstStyle/>
           <a:p>
-            <a:pPr algn="l"/>
+            <a:pPr algn="l">
+              <a:lnSpc>
+                <a:spcPct val="105000"/>
+              </a:lnSpc>
+            </a:pPr>
             <a:r>
               <a:rPr sz="3000" b="1" i="0">
                 <a:solidFill>
@@ -17257,7 +17269,7 @@
         </p:nvSpPr>
         <p:spPr>
           <a:xfrm>
-            <a:off x="548640" y="1051560"/>
+            <a:off x="548640" y="1394460"/>
             <a:ext cx="11155680" cy="365760"/>
           </a:xfrm>
           <a:prstGeom prst="rect">
@@ -17295,8 +17307,8 @@
         </p:nvSpPr>
         <p:spPr>
           <a:xfrm>
-            <a:off x="548640" y="1508760"/>
-            <a:ext cx="5486400" cy="2286000"/>
+            <a:off x="548640" y="1851660"/>
+            <a:ext cx="5486400" cy="1885950"/>
           </a:xfrm>
           <a:prstGeom prst="rect">
             <a:avLst/>
@@ -17339,7 +17351,7 @@
         </p:nvSpPr>
         <p:spPr>
           <a:xfrm>
-            <a:off x="548640" y="1508760"/>
+            <a:off x="548640" y="1851660"/>
             <a:ext cx="5486400" cy="54864"/>
           </a:xfrm>
           <a:prstGeom prst="rect">
@@ -17383,7 +17395,7 @@
         </p:nvSpPr>
         <p:spPr>
           <a:xfrm>
-            <a:off x="777240" y="1673352"/>
+            <a:off x="777240" y="2016252"/>
             <a:ext cx="5029200" cy="457200"/>
           </a:xfrm>
           <a:prstGeom prst="rect">
@@ -17421,8 +17433,8 @@
         </p:nvSpPr>
         <p:spPr>
           <a:xfrm>
-            <a:off x="777240" y="2148840"/>
-            <a:ext cx="5029200" cy="1508760"/>
+            <a:off x="777240" y="2491740"/>
+            <a:ext cx="5029200" cy="1108710"/>
           </a:xfrm>
           <a:prstGeom prst="rect">
             <a:avLst/>
@@ -17463,8 +17475,8 @@
         </p:nvSpPr>
         <p:spPr>
           <a:xfrm>
-            <a:off x="6217920" y="1508760"/>
-            <a:ext cx="5486400" cy="2286000"/>
+            <a:off x="6217920" y="1851660"/>
+            <a:ext cx="5486400" cy="1885950"/>
           </a:xfrm>
           <a:prstGeom prst="rect">
             <a:avLst/>
@@ -17507,7 +17519,7 @@
         </p:nvSpPr>
         <p:spPr>
           <a:xfrm>
-            <a:off x="6217920" y="1508760"/>
+            <a:off x="6217920" y="1851660"/>
             <a:ext cx="5486400" cy="54864"/>
           </a:xfrm>
           <a:prstGeom prst="rect">
@@ -17551,7 +17563,7 @@
         </p:nvSpPr>
         <p:spPr>
           <a:xfrm>
-            <a:off x="6446520" y="1673352"/>
+            <a:off x="6446520" y="2016252"/>
             <a:ext cx="5029200" cy="457200"/>
           </a:xfrm>
           <a:prstGeom prst="rect">
@@ -17589,8 +17601,8 @@
         </p:nvSpPr>
         <p:spPr>
           <a:xfrm>
-            <a:off x="6446520" y="2148840"/>
-            <a:ext cx="5029200" cy="1508760"/>
+            <a:off x="6446520" y="2491740"/>
+            <a:ext cx="5029200" cy="1108710"/>
           </a:xfrm>
           <a:prstGeom prst="rect">
             <a:avLst/>
@@ -17631,8 +17643,8 @@
         </p:nvSpPr>
         <p:spPr>
           <a:xfrm>
-            <a:off x="548640" y="3977640"/>
-            <a:ext cx="5486400" cy="2286000"/>
+            <a:off x="548640" y="3920490"/>
+            <a:ext cx="5486400" cy="1885950"/>
           </a:xfrm>
           <a:prstGeom prst="rect">
             <a:avLst/>
@@ -17675,7 +17687,7 @@
         </p:nvSpPr>
         <p:spPr>
           <a:xfrm>
-            <a:off x="548640" y="3977640"/>
+            <a:off x="548640" y="3920490"/>
             <a:ext cx="5486400" cy="54864"/>
           </a:xfrm>
           <a:prstGeom prst="rect">
@@ -17719,7 +17731,7 @@
         </p:nvSpPr>
         <p:spPr>
           <a:xfrm>
-            <a:off x="777240" y="4142232"/>
+            <a:off x="777240" y="4085082"/>
             <a:ext cx="5029200" cy="457200"/>
           </a:xfrm>
           <a:prstGeom prst="rect">
@@ -17757,8 +17769,8 @@
         </p:nvSpPr>
         <p:spPr>
           <a:xfrm>
-            <a:off x="777240" y="4617720"/>
-            <a:ext cx="5029200" cy="1508760"/>
+            <a:off x="777240" y="4560570"/>
+            <a:ext cx="5029200" cy="1108710"/>
           </a:xfrm>
           <a:prstGeom prst="rect">
             <a:avLst/>
@@ -17799,8 +17811,8 @@
         </p:nvSpPr>
         <p:spPr>
           <a:xfrm>
-            <a:off x="6217920" y="3977640"/>
-            <a:ext cx="5486400" cy="2286000"/>
+            <a:off x="6217920" y="3920490"/>
+            <a:ext cx="5486400" cy="1885950"/>
           </a:xfrm>
           <a:prstGeom prst="rect">
             <a:avLst/>
@@ -17843,7 +17855,7 @@
         </p:nvSpPr>
         <p:spPr>
           <a:xfrm>
-            <a:off x="6217920" y="3977640"/>
+            <a:off x="6217920" y="3920490"/>
             <a:ext cx="5486400" cy="54864"/>
           </a:xfrm>
           <a:prstGeom prst="rect">
@@ -17887,7 +17899,7 @@
         </p:nvSpPr>
         <p:spPr>
           <a:xfrm>
-            <a:off x="6446520" y="4142232"/>
+            <a:off x="6446520" y="4085082"/>
             <a:ext cx="5029200" cy="457200"/>
           </a:xfrm>
           <a:prstGeom prst="rect">
@@ -17925,8 +17937,8 @@
         </p:nvSpPr>
         <p:spPr>
           <a:xfrm>
-            <a:off x="6446520" y="4617720"/>
-            <a:ext cx="5029200" cy="1508760"/>
+            <a:off x="6446520" y="4560570"/>
+            <a:ext cx="5029200" cy="1108710"/>
           </a:xfrm>
           <a:prstGeom prst="rect">
             <a:avLst/>
@@ -18210,7 +18222,11 @@
           </a:bodyPr>
           <a:lstStyle/>
           <a:p>
-            <a:pPr algn="l"/>
+            <a:pPr algn="l">
+              <a:lnSpc>
+                <a:spcPct val="105000"/>
+              </a:lnSpc>
+            </a:pPr>
             <a:r>
               <a:rPr sz="3200" b="1" i="0">
                 <a:solidFill>
@@ -18231,7 +18247,7 @@
         </p:nvSpPr>
         <p:spPr>
           <a:xfrm>
-            <a:off x="548640" y="1188720"/>
+            <a:off x="548640" y="1207008"/>
             <a:ext cx="11155680" cy="365760"/>
           </a:xfrm>
           <a:prstGeom prst="rect">
@@ -18269,8 +18285,8 @@
         </p:nvSpPr>
         <p:spPr>
           <a:xfrm>
-            <a:off x="548640" y="1691640"/>
-            <a:ext cx="11155680" cy="2377440"/>
+            <a:off x="548640" y="1709928"/>
+            <a:ext cx="11155680" cy="2450592"/>
           </a:xfrm>
           <a:prstGeom prst="rect">
             <a:avLst/>
@@ -20518,7 +20534,7 @@
         <p:spPr>
           <a:xfrm>
             <a:off x="548640" y="960120"/>
-            <a:ext cx="10972800" cy="1188720"/>
+            <a:ext cx="10972800" cy="914400"/>
           </a:xfrm>
           <a:prstGeom prst="rect">
             <a:avLst/>
@@ -20559,8 +20575,8 @@
         </p:nvSpPr>
         <p:spPr>
           <a:xfrm>
-            <a:off x="548640" y="2194560"/>
-            <a:ext cx="10972800" cy="457200"/>
+            <a:off x="548640" y="1920239"/>
+            <a:ext cx="10972800" cy="365760"/>
           </a:xfrm>
           <a:prstGeom prst="rect">
             <a:avLst/>
@@ -20597,7 +20613,7 @@
         </p:nvSpPr>
         <p:spPr>
           <a:xfrm>
-            <a:off x="548640" y="2834640"/>
+            <a:off x="548640" y="2468879"/>
             <a:ext cx="11155680" cy="1920240"/>
           </a:xfrm>
           <a:prstGeom prst="rect">
@@ -20643,7 +20659,7 @@
         </p:nvSpPr>
         <p:spPr>
           <a:xfrm>
-            <a:off x="777240" y="2926080"/>
+            <a:off x="777240" y="2560319"/>
             <a:ext cx="10607040" cy="320040"/>
           </a:xfrm>
           <a:prstGeom prst="rect">
@@ -20681,7 +20697,7 @@
         </p:nvSpPr>
         <p:spPr>
           <a:xfrm>
-            <a:off x="777240" y="3246120"/>
+            <a:off x="777240" y="2880359"/>
             <a:ext cx="10607040" cy="1417320"/>
           </a:xfrm>
           <a:prstGeom prst="rect">
@@ -22373,7 +22389,7 @@
         <p:spPr>
           <a:xfrm>
             <a:off x="548640" y="411480"/>
-            <a:ext cx="11155680" cy="868680"/>
+            <a:ext cx="11155680" cy="777240"/>
           </a:xfrm>
           <a:prstGeom prst="rect">
             <a:avLst/>
@@ -22414,7 +22430,7 @@
         </p:nvSpPr>
         <p:spPr>
           <a:xfrm>
-            <a:off x="548640" y="1280160"/>
+            <a:off x="548640" y="1234440"/>
             <a:ext cx="11155680" cy="365760"/>
           </a:xfrm>
           <a:prstGeom prst="rect">
@@ -22452,7 +22468,7 @@
         </p:nvSpPr>
         <p:spPr>
           <a:xfrm>
-            <a:off x="548640" y="1828800"/>
+            <a:off x="548640" y="1737360"/>
             <a:ext cx="5486400" cy="411480"/>
           </a:xfrm>
           <a:prstGeom prst="rect">
@@ -22490,7 +22506,7 @@
         </p:nvSpPr>
         <p:spPr>
           <a:xfrm>
-            <a:off x="548640" y="2286000"/>
+            <a:off x="548640" y="2194560"/>
             <a:ext cx="5486400" cy="3749040"/>
           </a:xfrm>
           <a:prstGeom prst="rect">
@@ -22596,7 +22612,7 @@
         </p:nvSpPr>
         <p:spPr>
           <a:xfrm>
-            <a:off x="6309360" y="1828800"/>
+            <a:off x="6309360" y="1737360"/>
             <a:ext cx="5486400" cy="411480"/>
           </a:xfrm>
           <a:prstGeom prst="rect">
@@ -22634,7 +22650,7 @@
         </p:nvSpPr>
         <p:spPr>
           <a:xfrm>
-            <a:off x="6309360" y="2286000"/>
+            <a:off x="6309360" y="2194560"/>
             <a:ext cx="5486400" cy="3749040"/>
           </a:xfrm>
           <a:prstGeom prst="rect">
@@ -22967,7 +22983,7 @@
         <p:spPr>
           <a:xfrm>
             <a:off x="548640" y="411480"/>
-            <a:ext cx="11155680" cy="868680"/>
+            <a:ext cx="11155680" cy="1089660"/>
           </a:xfrm>
           <a:prstGeom prst="rect">
             <a:avLst/>
@@ -23008,7 +23024,7 @@
         </p:nvSpPr>
         <p:spPr>
           <a:xfrm>
-            <a:off x="548640" y="1280160"/>
+            <a:off x="548640" y="1546860"/>
             <a:ext cx="11155680" cy="365760"/>
           </a:xfrm>
           <a:prstGeom prst="rect">
@@ -23046,7 +23062,7 @@
         </p:nvSpPr>
         <p:spPr>
           <a:xfrm>
-            <a:off x="548640" y="1828800"/>
+            <a:off x="548640" y="2049780"/>
             <a:ext cx="5486400" cy="411480"/>
           </a:xfrm>
           <a:prstGeom prst="rect">
@@ -23084,8 +23100,8 @@
         </p:nvSpPr>
         <p:spPr>
           <a:xfrm>
-            <a:off x="548640" y="2286000"/>
-            <a:ext cx="5486400" cy="3749040"/>
+            <a:off x="548640" y="2506980"/>
+            <a:ext cx="5486400" cy="3436620"/>
           </a:xfrm>
           <a:prstGeom prst="rect">
             <a:avLst/>
@@ -23190,7 +23206,7 @@
         </p:nvSpPr>
         <p:spPr>
           <a:xfrm>
-            <a:off x="6309360" y="1828800"/>
+            <a:off x="6309360" y="2049780"/>
             <a:ext cx="5486400" cy="411480"/>
           </a:xfrm>
           <a:prstGeom prst="rect">
@@ -23228,8 +23244,8 @@
         </p:nvSpPr>
         <p:spPr>
           <a:xfrm>
-            <a:off x="6309360" y="2286000"/>
-            <a:ext cx="5486400" cy="3749040"/>
+            <a:off x="6309360" y="2506980"/>
+            <a:ext cx="5486400" cy="3436620"/>
           </a:xfrm>
           <a:prstGeom prst="rect">
             <a:avLst/>
@@ -23658,7 +23674,7 @@
         <p:spPr>
           <a:xfrm>
             <a:off x="548640" y="960120"/>
-            <a:ext cx="10972800" cy="1188720"/>
+            <a:ext cx="10972800" cy="914400"/>
           </a:xfrm>
           <a:prstGeom prst="rect">
             <a:avLst/>
@@ -23699,8 +23715,8 @@
         </p:nvSpPr>
         <p:spPr>
           <a:xfrm>
-            <a:off x="548640" y="2194560"/>
-            <a:ext cx="10972800" cy="457200"/>
+            <a:off x="548640" y="1920239"/>
+            <a:ext cx="10972800" cy="365760"/>
           </a:xfrm>
           <a:prstGeom prst="rect">
             <a:avLst/>
@@ -23737,7 +23753,7 @@
         </p:nvSpPr>
         <p:spPr>
           <a:xfrm>
-            <a:off x="548640" y="2834640"/>
+            <a:off x="548640" y="2468879"/>
             <a:ext cx="11155680" cy="1920240"/>
           </a:xfrm>
           <a:prstGeom prst="rect">
@@ -23783,7 +23799,7 @@
         </p:nvSpPr>
         <p:spPr>
           <a:xfrm>
-            <a:off x="777240" y="2926080"/>
+            <a:off x="777240" y="2560319"/>
             <a:ext cx="10607040" cy="320040"/>
           </a:xfrm>
           <a:prstGeom prst="rect">
@@ -23821,7 +23837,7 @@
         </p:nvSpPr>
         <p:spPr>
           <a:xfrm>
-            <a:off x="777240" y="3246120"/>
+            <a:off x="777240" y="2880359"/>
             <a:ext cx="10607040" cy="1417320"/>
           </a:xfrm>
           <a:prstGeom prst="rect">
@@ -25363,7 +25379,7 @@
         <p:spPr>
           <a:xfrm>
             <a:off x="548640" y="960120"/>
-            <a:ext cx="10972800" cy="1188720"/>
+            <a:ext cx="10972800" cy="1356360"/>
           </a:xfrm>
           <a:prstGeom prst="rect">
             <a:avLst/>
@@ -25404,8 +25420,8 @@
         </p:nvSpPr>
         <p:spPr>
           <a:xfrm>
-            <a:off x="548640" y="2194560"/>
-            <a:ext cx="10972800" cy="457200"/>
+            <a:off x="548640" y="2362199"/>
+            <a:ext cx="10972800" cy="365760"/>
           </a:xfrm>
           <a:prstGeom prst="rect">
             <a:avLst/>
@@ -25442,7 +25458,7 @@
         </p:nvSpPr>
         <p:spPr>
           <a:xfrm>
-            <a:off x="548640" y="2834640"/>
+            <a:off x="548640" y="2910839"/>
             <a:ext cx="11155680" cy="1920240"/>
           </a:xfrm>
           <a:prstGeom prst="rect">
@@ -25488,7 +25504,7 @@
         </p:nvSpPr>
         <p:spPr>
           <a:xfrm>
-            <a:off x="777240" y="2926080"/>
+            <a:off x="777240" y="3002279"/>
             <a:ext cx="10607040" cy="320040"/>
           </a:xfrm>
           <a:prstGeom prst="rect">
@@ -25526,7 +25542,7 @@
         </p:nvSpPr>
         <p:spPr>
           <a:xfrm>
-            <a:off x="777240" y="3246120"/>
+            <a:off x="777240" y="3322319"/>
             <a:ext cx="10607040" cy="1417320"/>
           </a:xfrm>
           <a:prstGeom prst="rect">
@@ -25883,7 +25899,7 @@
         <p:spPr>
           <a:xfrm>
             <a:off x="548640" y="411480"/>
-            <a:ext cx="11155680" cy="868680"/>
+            <a:ext cx="11155680" cy="777240"/>
           </a:xfrm>
           <a:prstGeom prst="rect">
             <a:avLst/>
@@ -25924,7 +25940,7 @@
         </p:nvSpPr>
         <p:spPr>
           <a:xfrm>
-            <a:off x="548640" y="1280160"/>
+            <a:off x="548640" y="1234440"/>
             <a:ext cx="11155680" cy="365760"/>
           </a:xfrm>
           <a:prstGeom prst="rect">
@@ -25962,8 +25978,8 @@
         </p:nvSpPr>
         <p:spPr>
           <a:xfrm>
-            <a:off x="548640" y="1783080"/>
-            <a:ext cx="11155680" cy="4023360"/>
+            <a:off x="548640" y="1737360"/>
+            <a:ext cx="11155680" cy="4069080"/>
           </a:xfrm>
           <a:prstGeom prst="rect">
             <a:avLst/>
@@ -26317,7 +26333,7 @@
         <p:spPr>
           <a:xfrm>
             <a:off x="548640" y="411480"/>
-            <a:ext cx="11155680" cy="868680"/>
+            <a:ext cx="11155680" cy="777240"/>
           </a:xfrm>
           <a:prstGeom prst="rect">
             <a:avLst/>
@@ -26358,7 +26374,7 @@
         </p:nvSpPr>
         <p:spPr>
           <a:xfrm>
-            <a:off x="548640" y="1280160"/>
+            <a:off x="548640" y="1234440"/>
             <a:ext cx="11155680" cy="365760"/>
           </a:xfrm>
           <a:prstGeom prst="rect">
@@ -26396,7 +26412,7 @@
         </p:nvSpPr>
         <p:spPr>
           <a:xfrm>
-            <a:off x="548640" y="1828800"/>
+            <a:off x="548640" y="1737360"/>
             <a:ext cx="5486400" cy="411480"/>
           </a:xfrm>
           <a:prstGeom prst="rect">
@@ -26434,7 +26450,7 @@
         </p:nvSpPr>
         <p:spPr>
           <a:xfrm>
-            <a:off x="548640" y="2286000"/>
+            <a:off x="548640" y="2194560"/>
             <a:ext cx="5486400" cy="3749040"/>
           </a:xfrm>
           <a:prstGeom prst="rect">
@@ -26580,7 +26596,7 @@
         </p:nvSpPr>
         <p:spPr>
           <a:xfrm>
-            <a:off x="6309360" y="1828800"/>
+            <a:off x="6309360" y="1737360"/>
             <a:ext cx="5486400" cy="411480"/>
           </a:xfrm>
           <a:prstGeom prst="rect">
@@ -26618,7 +26634,7 @@
         </p:nvSpPr>
         <p:spPr>
           <a:xfrm>
-            <a:off x="6309360" y="2286000"/>
+            <a:off x="6309360" y="2194560"/>
             <a:ext cx="5486400" cy="3749040"/>
           </a:xfrm>
           <a:prstGeom prst="rect">
@@ -27009,7 +27025,7 @@
         <p:spPr>
           <a:xfrm>
             <a:off x="548640" y="411480"/>
-            <a:ext cx="11155680" cy="868680"/>
+            <a:ext cx="11155680" cy="1089660"/>
           </a:xfrm>
           <a:prstGeom prst="rect">
             <a:avLst/>
@@ -27050,7 +27066,7 @@
         </p:nvSpPr>
         <p:spPr>
           <a:xfrm>
-            <a:off x="548640" y="1280160"/>
+            <a:off x="548640" y="1546860"/>
             <a:ext cx="11155680" cy="365760"/>
           </a:xfrm>
           <a:prstGeom prst="rect">
@@ -27088,7 +27104,7 @@
         </p:nvSpPr>
         <p:spPr>
           <a:xfrm>
-            <a:off x="548640" y="1828800"/>
+            <a:off x="548640" y="2049780"/>
             <a:ext cx="5486400" cy="411480"/>
           </a:xfrm>
           <a:prstGeom prst="rect">
@@ -27126,8 +27142,8 @@
         </p:nvSpPr>
         <p:spPr>
           <a:xfrm>
-            <a:off x="548640" y="2286000"/>
-            <a:ext cx="5486400" cy="3749040"/>
+            <a:off x="548640" y="2506980"/>
+            <a:ext cx="5486400" cy="3436620"/>
           </a:xfrm>
           <a:prstGeom prst="rect">
             <a:avLst/>
@@ -27232,7 +27248,7 @@
         </p:nvSpPr>
         <p:spPr>
           <a:xfrm>
-            <a:off x="6309360" y="1828800"/>
+            <a:off x="6309360" y="2049780"/>
             <a:ext cx="5486400" cy="411480"/>
           </a:xfrm>
           <a:prstGeom prst="rect">
@@ -27270,8 +27286,8 @@
         </p:nvSpPr>
         <p:spPr>
           <a:xfrm>
-            <a:off x="6309360" y="2286000"/>
-            <a:ext cx="5486400" cy="3749040"/>
+            <a:off x="6309360" y="2506980"/>
+            <a:ext cx="5486400" cy="3436620"/>
           </a:xfrm>
           <a:prstGeom prst="rect">
             <a:avLst/>
@@ -27603,7 +27619,7 @@
         <p:spPr>
           <a:xfrm>
             <a:off x="548640" y="411480"/>
-            <a:ext cx="11155680" cy="868680"/>
+            <a:ext cx="11155680" cy="777240"/>
           </a:xfrm>
           <a:prstGeom prst="rect">
             <a:avLst/>
@@ -27644,7 +27660,7 @@
         </p:nvSpPr>
         <p:spPr>
           <a:xfrm>
-            <a:off x="548640" y="1280160"/>
+            <a:off x="548640" y="1234440"/>
             <a:ext cx="11155680" cy="365760"/>
           </a:xfrm>
           <a:prstGeom prst="rect">
@@ -27682,7 +27698,7 @@
         </p:nvSpPr>
         <p:spPr>
           <a:xfrm>
-            <a:off x="548640" y="1828800"/>
+            <a:off x="548640" y="1737360"/>
             <a:ext cx="5486400" cy="411480"/>
           </a:xfrm>
           <a:prstGeom prst="rect">
@@ -27720,7 +27736,7 @@
         </p:nvSpPr>
         <p:spPr>
           <a:xfrm>
-            <a:off x="548640" y="2286000"/>
+            <a:off x="548640" y="2194560"/>
             <a:ext cx="5486400" cy="3749040"/>
           </a:xfrm>
           <a:prstGeom prst="rect">
@@ -27826,7 +27842,7 @@
         </p:nvSpPr>
         <p:spPr>
           <a:xfrm>
-            <a:off x="6309360" y="1828800"/>
+            <a:off x="6309360" y="1737360"/>
             <a:ext cx="5486400" cy="411480"/>
           </a:xfrm>
           <a:prstGeom prst="rect">
@@ -27864,7 +27880,7 @@
         </p:nvSpPr>
         <p:spPr>
           <a:xfrm>
-            <a:off x="6309360" y="2286000"/>
+            <a:off x="6309360" y="2194560"/>
             <a:ext cx="5486400" cy="3749040"/>
           </a:xfrm>
           <a:prstGeom prst="rect">
@@ -29750,7 +29766,7 @@
         <p:spPr>
           <a:xfrm>
             <a:off x="548640" y="411480"/>
-            <a:ext cx="11155680" cy="1005840"/>
+            <a:ext cx="11155680" cy="1036320"/>
           </a:xfrm>
           <a:prstGeom prst="rect">
             <a:avLst/>
@@ -29847,7 +29863,7 @@
           </a:ln>
         </p:spPr>
         <p:txBody>
-          <a:bodyPr wrap="square" lIns="45720" rIns="45720" tIns="18288" bIns="18288" anchor="t">
+          <a:bodyPr wrap="square" lIns="45720" rIns="45720" tIns="18288" bIns="18288">
             <a:spAutoFit/>
           </a:bodyPr>
           <a:lstStyle/>
@@ -29858,13 +29874,22 @@
               </a:lnSpc>
             </a:pPr>
             <a:r>
-              <a:rPr sz="12000" b="1" i="0">
+              <a:rPr sz="12000" b="1">
                 <a:solidFill>
                   <a:srgbClr val="CC0000"/>
                 </a:solidFill>
                 <a:latin typeface="Calibri"/>
               </a:rPr>
-              <a:t>−19 pp</a:t>
+              <a:t>−19</a:t>
+            </a:r>
+            <a:r>
+              <a:rPr sz="5600" b="1">
+                <a:solidFill>
+                  <a:srgbClr val="CC0000"/>
+                </a:solidFill>
+                <a:latin typeface="Calibri"/>
+              </a:rPr>
+              <a:t>pp</a:t>
             </a:r>
           </a:p>
         </p:txBody>
@@ -31258,7 +31283,11 @@
           </a:bodyPr>
           <a:lstStyle/>
           <a:p>
-            <a:pPr algn="l"/>
+            <a:pPr algn="l">
+              <a:lnSpc>
+                <a:spcPct val="105000"/>
+              </a:lnSpc>
+            </a:pPr>
             <a:r>
               <a:rPr sz="3000" b="1" i="0">
                 <a:solidFill>
@@ -31279,7 +31308,7 @@
         </p:nvSpPr>
         <p:spPr>
           <a:xfrm>
-            <a:off x="548640" y="1051560"/>
+            <a:off x="548640" y="1069848"/>
             <a:ext cx="11155680" cy="365760"/>
           </a:xfrm>
           <a:prstGeom prst="rect">
@@ -31317,8 +31346,8 @@
         </p:nvSpPr>
         <p:spPr>
           <a:xfrm>
-            <a:off x="548640" y="1508760"/>
-            <a:ext cx="5486400" cy="2286000"/>
+            <a:off x="548640" y="1527048"/>
+            <a:ext cx="5486400" cy="2048256"/>
           </a:xfrm>
           <a:prstGeom prst="rect">
             <a:avLst/>
@@ -31361,7 +31390,7 @@
         </p:nvSpPr>
         <p:spPr>
           <a:xfrm>
-            <a:off x="548640" y="1508760"/>
+            <a:off x="548640" y="1527048"/>
             <a:ext cx="5486400" cy="54864"/>
           </a:xfrm>
           <a:prstGeom prst="rect">
@@ -31405,7 +31434,7 @@
         </p:nvSpPr>
         <p:spPr>
           <a:xfrm>
-            <a:off x="777240" y="1673352"/>
+            <a:off x="777240" y="1691640"/>
             <a:ext cx="5029200" cy="457200"/>
           </a:xfrm>
           <a:prstGeom prst="rect">
@@ -31443,8 +31472,8 @@
         </p:nvSpPr>
         <p:spPr>
           <a:xfrm>
-            <a:off x="777240" y="2148840"/>
-            <a:ext cx="5029200" cy="1508760"/>
+            <a:off x="777240" y="2167128"/>
+            <a:ext cx="5029200" cy="1271016"/>
           </a:xfrm>
           <a:prstGeom prst="rect">
             <a:avLst/>
@@ -31529,8 +31558,8 @@
         </p:nvSpPr>
         <p:spPr>
           <a:xfrm>
-            <a:off x="6217920" y="1508760"/>
-            <a:ext cx="5486400" cy="2286000"/>
+            <a:off x="6217920" y="1527048"/>
+            <a:ext cx="5486400" cy="2048256"/>
           </a:xfrm>
           <a:prstGeom prst="rect">
             <a:avLst/>
@@ -31573,7 +31602,7 @@
         </p:nvSpPr>
         <p:spPr>
           <a:xfrm>
-            <a:off x="6217920" y="1508760"/>
+            <a:off x="6217920" y="1527048"/>
             <a:ext cx="5486400" cy="54864"/>
           </a:xfrm>
           <a:prstGeom prst="rect">
@@ -31617,7 +31646,7 @@
         </p:nvSpPr>
         <p:spPr>
           <a:xfrm>
-            <a:off x="6446520" y="1673352"/>
+            <a:off x="6446520" y="1691640"/>
             <a:ext cx="5029200" cy="457200"/>
           </a:xfrm>
           <a:prstGeom prst="rect">
@@ -31655,8 +31684,8 @@
         </p:nvSpPr>
         <p:spPr>
           <a:xfrm>
-            <a:off x="6446520" y="2148840"/>
-            <a:ext cx="5029200" cy="1508760"/>
+            <a:off x="6446520" y="2167128"/>
+            <a:ext cx="5029200" cy="1271016"/>
           </a:xfrm>
           <a:prstGeom prst="rect">
             <a:avLst/>
@@ -31721,8 +31750,8 @@
         </p:nvSpPr>
         <p:spPr>
           <a:xfrm>
-            <a:off x="548640" y="3977640"/>
-            <a:ext cx="5486400" cy="2286000"/>
+            <a:off x="548640" y="3758184"/>
+            <a:ext cx="5486400" cy="2048256"/>
           </a:xfrm>
           <a:prstGeom prst="rect">
             <a:avLst/>
@@ -31765,7 +31794,7 @@
         </p:nvSpPr>
         <p:spPr>
           <a:xfrm>
-            <a:off x="548640" y="3977640"/>
+            <a:off x="548640" y="3758184"/>
             <a:ext cx="5486400" cy="54864"/>
           </a:xfrm>
           <a:prstGeom prst="rect">
@@ -31809,7 +31838,7 @@
         </p:nvSpPr>
         <p:spPr>
           <a:xfrm>
-            <a:off x="777240" y="4142232"/>
+            <a:off x="777240" y="3922776"/>
             <a:ext cx="5029200" cy="457200"/>
           </a:xfrm>
           <a:prstGeom prst="rect">
@@ -31847,8 +31876,8 @@
         </p:nvSpPr>
         <p:spPr>
           <a:xfrm>
-            <a:off x="777240" y="4617720"/>
-            <a:ext cx="5029200" cy="1508760"/>
+            <a:off x="777240" y="4398264"/>
+            <a:ext cx="5029200" cy="1271016"/>
           </a:xfrm>
           <a:prstGeom prst="rect">
             <a:avLst/>
@@ -31913,8 +31942,8 @@
         </p:nvSpPr>
         <p:spPr>
           <a:xfrm>
-            <a:off x="6217920" y="3977640"/>
-            <a:ext cx="5486400" cy="2286000"/>
+            <a:off x="6217920" y="3758184"/>
+            <a:ext cx="5486400" cy="2048256"/>
           </a:xfrm>
           <a:prstGeom prst="rect">
             <a:avLst/>
@@ -31957,7 +31986,7 @@
         </p:nvSpPr>
         <p:spPr>
           <a:xfrm>
-            <a:off x="6217920" y="3977640"/>
+            <a:off x="6217920" y="3758184"/>
             <a:ext cx="5486400" cy="54864"/>
           </a:xfrm>
           <a:prstGeom prst="rect">
@@ -32001,7 +32030,7 @@
         </p:nvSpPr>
         <p:spPr>
           <a:xfrm>
-            <a:off x="6446520" y="4142232"/>
+            <a:off x="6446520" y="3922776"/>
             <a:ext cx="5029200" cy="457200"/>
           </a:xfrm>
           <a:prstGeom prst="rect">
@@ -32039,8 +32068,8 @@
         </p:nvSpPr>
         <p:spPr>
           <a:xfrm>
-            <a:off x="6446520" y="4617720"/>
-            <a:ext cx="5029200" cy="1508760"/>
+            <a:off x="6446520" y="4398264"/>
+            <a:ext cx="5029200" cy="1271016"/>
           </a:xfrm>
           <a:prstGeom prst="rect">
             <a:avLst/>
